--- a/lecons/F5/63_F5_M3_FS06_Site_and_Situation_of_Douala.pptx
+++ b/lecons/F5/63_F5_M3_FS06_Site_and_Situation_of_Douala.pptx
@@ -13154,7 +13154,7 @@
               <a:buNone/>
             </a:pPr>
             <a:r>
-              <a:rPr lang="en-US" sz="4000" b="1" dirty="0">
+              <a:rPr lang="en-US" sz="3200" b="1" dirty="0">
                 <a:solidFill>
                   <a:srgbClr val="111111"/>
                 </a:solidFill>
@@ -13164,7 +13164,7 @@
               </a:rPr>
               <a:t>Topic: Human Characteristics of Cameroon</a:t>
             </a:r>
-            <a:endParaRPr lang="en-US" sz="4000" dirty="0"/>
+            <a:endParaRPr lang="en-US" sz="3200" dirty="0"/>
           </a:p>
           <a:p>
             <a:pPr algn="l" indent="0" marL="0">
@@ -13174,7 +13174,7 @@
               <a:buNone/>
             </a:pPr>
             <a:r>
-              <a:rPr lang="en-US" sz="4000" b="1" dirty="0">
+              <a:rPr lang="en-US" sz="3200" b="1" dirty="0">
                 <a:solidFill>
                   <a:srgbClr val="111111"/>
                 </a:solidFill>
@@ -13184,7 +13184,7 @@
               </a:rPr>
               <a:t>Sub-topic: Development of Settlements in Cameroon</a:t>
             </a:r>
-            <a:endParaRPr lang="en-US" sz="4000" dirty="0"/>
+            <a:endParaRPr lang="en-US" sz="3200" dirty="0"/>
           </a:p>
           <a:p>
             <a:pPr algn="l" indent="0" marL="0">
@@ -13194,7 +13194,7 @@
               <a:buNone/>
             </a:pPr>
             <a:r>
-              <a:rPr lang="en-US" sz="4000" b="1" dirty="0">
+              <a:rPr lang="en-US" sz="3200" b="1" dirty="0">
                 <a:solidFill>
                   <a:srgbClr val="990011"/>
                 </a:solidFill>
@@ -13204,7 +13204,7 @@
               </a:rPr>
               <a:t>Further Study 6: Site and Situation of Douala</a:t>
             </a:r>
-            <a:endParaRPr lang="en-US" sz="4000" dirty="0"/>
+            <a:endParaRPr lang="en-US" sz="3200" dirty="0"/>
           </a:p>
         </p:txBody>
       </p:sp>

--- a/lecons/F5/63_F5_M3_FS06_Site_and_Situation_of_Douala.pptx
+++ b/lecons/F5/63_F5_M3_FS06_Site_and_Situation_of_Douala.pptx
@@ -55,9 +55,10 @@
     <p:sldId id="303" r:id="rId49"/>
     <p:sldId id="304" r:id="rId50"/>
     <p:sldId id="305" r:id="rId51"/>
+    <p:sldId id="306" r:id="rId52"/>
   </p:sldIdLst>
   <p:notesMasterIdLst>
-    <p:notesMasterId r:id="rId52"/>
+    <p:notesMasterId r:id="rId53"/>
   </p:notesMasterIdLst>
   <p:sldSz cx="12192000" cy="6858000"/>
   <p:notesSz cx="6858000" cy="12192000"/>
@@ -3279,7 +3280,7 @@
           <a:p>
             <a:r>
               <a:rPr lang="en-US" dirty="0"/>
-              <a:t>Let us copy Influence on the Growth of Douala. The site and situation influenced growth as follows. On this slide we have Port and Industry and trade. Write each point on a new line, with the key term first, and explain it in your own words when we revise. When you finish, we go to the next slide.</a:t>
+              <a:t>Let us copy Advantages for Growth. The site and situation helped Douala to grow in the following ways. On this slide we have Port and Industry and trade. Write each point on a new line, with the key term first, and explain it in your own words when we revise. When you finish, we go to the next slide.</a:t>
             </a:r>
             <a:endParaRPr lang="en-US" dirty="0"/>
           </a:p>
@@ -3367,7 +3368,7 @@
           <a:p>
             <a:r>
               <a:rPr lang="en-US" dirty="0"/>
-              <a:t>We continue with Influence on the Growth of Douala. On this slide we have Routes and Problems. Write each point on a new line, with the key term first, and explain it in your own words when we revise.</a:t>
+              <a:t>We continue with Advantages for Growth. On this slide we have Routes. Write each point on a new line, with the key term first, and explain it in your own words when we revise.</a:t>
             </a:r>
             <a:endParaRPr lang="en-US" dirty="0"/>
           </a:p>
@@ -3543,7 +3544,7 @@
           <a:p>
             <a:r>
               <a:rPr lang="en-US" dirty="0"/>
-              <a:t>Now let us check what you have understood. Question 1: Describe the site of Douala. Answer in your exercise book.</a:t>
+              <a:t>Let us copy Limits to Growth. The site limits the growth of Douala in the following ways. On this slide we have Floods, Swamps and Silting of the channel. Write each point on a new line, with the key term first, and explain it in your own words when we revise.</a:t>
             </a:r>
             <a:endParaRPr lang="en-US" dirty="0"/>
           </a:p>
@@ -3631,7 +3632,7 @@
           <a:p>
             <a:r>
               <a:rPr lang="en-US" dirty="0"/>
-              <a:t>The expected answer is: low, flat land on the banks of the Wouri estuary. If you got it right, well done.</a:t>
+              <a:t>Now let us check what you have understood. Question 1: Describe the site of Douala. Answer in your exercise book.</a:t>
             </a:r>
             <a:endParaRPr lang="en-US" dirty="0"/>
           </a:p>
@@ -3719,7 +3720,7 @@
           <a:p>
             <a:r>
               <a:rPr lang="en-US" dirty="0"/>
-              <a:t>Now let us check what you have understood. Question 2: Give two ways the situation helped Douala grow. Answer in your exercise book.</a:t>
+              <a:t>The expected answer is: low, flat land on the banks of the Wouri estuary. If you got it right, well done.</a:t>
             </a:r>
             <a:endParaRPr lang="en-US" dirty="0"/>
           </a:p>
@@ -3807,7 +3808,7 @@
           <a:p>
             <a:r>
               <a:rPr lang="en-US" dirty="0"/>
-              <a:t>The expected answer is: its port and its routes to the interior. If you got it right, well done.</a:t>
+              <a:t>Now let us check what you have understood. Question 2: Give two ways the situation helped Douala grow. Answer in your exercise book.</a:t>
             </a:r>
             <a:endParaRPr lang="en-US" dirty="0"/>
           </a:p>
@@ -3895,7 +3896,7 @@
           <a:p>
             <a:r>
               <a:rPr lang="en-US" dirty="0"/>
-              <a:t>For those who need more practice, fill in the blanks in your exercise book. The answers are: number 1, Wouri; number 2, Bonabéri; number 3, floods (swamps).</a:t>
+              <a:t>The expected answer is: its port and its routes to the interior. If you got it right, well done.</a:t>
             </a:r>
             <a:endParaRPr lang="en-US" dirty="0"/>
           </a:p>
@@ -3983,7 +3984,7 @@
           <a:p>
             <a:r>
               <a:rPr lang="en-US" dirty="0"/>
-              <a:t>For your homework: Draw a labelled diagram of the site and situation of Douala. We shall correct it at the beginning of our next lesson.</a:t>
+              <a:t>For those who need more practice, fill in the blanks in your exercise book. The answers are: number 1, Wouri; number 2, Bonabéri; number 3, floods (swamps).</a:t>
             </a:r>
             <a:endParaRPr lang="en-US" dirty="0"/>
           </a:p>
@@ -4071,7 +4072,7 @@
           <a:p>
             <a:r>
               <a:rPr lang="en-US" dirty="0"/>
-              <a:t>Let us play the bilingual game. I say a word in English, and you give me the French word. Then we do the reverse.</a:t>
+              <a:t>For your homework: Draw a labelled diagram of the site and situation of Douala. We shall correct it at the beginning of our next lesson.</a:t>
             </a:r>
             <a:endParaRPr lang="en-US" dirty="0"/>
           </a:p>
@@ -4159,7 +4160,7 @@
           <a:p>
             <a:r>
               <a:rPr lang="en-US" dirty="0"/>
-              <a:t>I record this information in the official logbook of the class after the lesson.</a:t>
+              <a:t>Let us play the bilingual game. I say a word in English, and you give me the French word. Then we do the reverse.</a:t>
             </a:r>
             <a:endParaRPr lang="en-US" dirty="0"/>
           </a:p>
@@ -4247,7 +4248,7 @@
           <a:p>
             <a:r>
               <a:rPr lang="en-US" dirty="0"/>
-              <a:t>I complete the second page of the logbook: the matter taught, the evaluation, the homework and the attendance.</a:t>
+              <a:t>I record this information in the official logbook of the class after the lesson.</a:t>
             </a:r>
             <a:endParaRPr lang="en-US" dirty="0"/>
           </a:p>
@@ -4335,7 +4336,7 @@
           <a:p>
             <a:r>
               <a:rPr lang="en-US" dirty="0"/>
-              <a:t>This slide is for me, the teacher: it gives the timing of the lesson and what to do if the projector is not available.</a:t>
+              <a:t>I complete the second page of the logbook: the matter taught, the evaluation, the homework and the attendance.</a:t>
             </a:r>
             <a:endParaRPr lang="en-US" dirty="0"/>
           </a:p>
@@ -4511,7 +4512,7 @@
           <a:p>
             <a:r>
               <a:rPr lang="en-US" dirty="0"/>
-              <a:t>These are the references and picture credits used to prepare this lesson.</a:t>
+              <a:t>This slide is for me, the teacher: it gives the timing of the lesson and what to do if the projector is not available.</a:t>
             </a:r>
             <a:endParaRPr lang="en-US" dirty="0"/>
           </a:p>
@@ -4535,6 +4536,94 @@
             <a:fld id="{F7021451-1387-4CA6-816F-3879F97B5CBC}" type="slidenum">
               <a:rPr lang="en-US"/>
               <a:t>50</a:t>
+            </a:fld>
+            <a:endParaRPr lang="en-US"/>
+          </a:p>
+        </p:txBody>
+      </p:sp>
+    </p:spTree>
+    <p:extLst>
+      <p:ext uri="{BB962C8B-B14F-4D97-AF65-F5344CB8AC3E}">
+        <p14:creationId xmlns:p14="http://schemas.microsoft.com/office/powerpoint/2010/main" val="1024086991"/>
+      </p:ext>
+    </p:extLst>
+  </p:cSld>
+  <p:clrMapOvr>
+    <a:masterClrMapping/>
+  </p:clrMapOvr>
+</p:notes>
+</file>
+
+<file path=ppt/notesSlides/notesSlide51.xml><?xml version="1.0" encoding="utf-8"?>
+<p:notes xmlns:a="http://schemas.openxmlformats.org/drawingml/2006/main" xmlns:r="http://schemas.openxmlformats.org/officeDocument/2006/relationships" xmlns:p="http://schemas.openxmlformats.org/presentationml/2006/main">
+  <p:cSld>
+    <p:spTree>
+      <p:nvGrpSpPr>
+        <p:cNvPr id="1" name=""/>
+        <p:cNvGrpSpPr/>
+        <p:nvPr/>
+      </p:nvGrpSpPr>
+      <p:grpSpPr>
+        <a:xfrm>
+          <a:off x="0" y="0"/>
+          <a:ext cx="0" cy="0"/>
+          <a:chOff x="0" y="0"/>
+          <a:chExt cx="0" cy="0"/>
+        </a:xfrm>
+      </p:grpSpPr>
+      <p:sp>
+        <p:nvSpPr>
+          <p:cNvPr id="2" name="Slide Image Placeholder 1"/>
+          <p:cNvSpPr>
+            <a:spLocks noGrp="1" noRot="1" noChangeAspect="1"/>
+          </p:cNvSpPr>
+          <p:nvPr>
+            <p:ph type="sldImg"/>
+          </p:nvPr>
+        </p:nvSpPr>
+        <p:spPr/>
+      </p:sp>
+      <p:sp>
+        <p:nvSpPr>
+          <p:cNvPr id="3" name="Notes Placeholder 2"/>
+          <p:cNvSpPr>
+            <a:spLocks noGrp="1"/>
+          </p:cNvSpPr>
+          <p:nvPr>
+            <p:ph type="body" idx="1"/>
+          </p:nvPr>
+        </p:nvSpPr>
+        <p:spPr/>
+        <p:txBody>
+          <a:bodyPr/>
+          <a:lstStyle/>
+          <a:p>
+            <a:r>
+              <a:rPr lang="en-US" dirty="0"/>
+              <a:t>These are the references and picture credits used to prepare this lesson.</a:t>
+            </a:r>
+            <a:endParaRPr lang="en-US" dirty="0"/>
+          </a:p>
+        </p:txBody>
+      </p:sp>
+      <p:sp>
+        <p:nvSpPr>
+          <p:cNvPr id="4" name="Slide Number Placeholder 3"/>
+          <p:cNvSpPr>
+            <a:spLocks noGrp="1"/>
+          </p:cNvSpPr>
+          <p:nvPr>
+            <p:ph type="sldNum" sz="quarter" idx="10"/>
+          </p:nvPr>
+        </p:nvSpPr>
+        <p:spPr/>
+        <p:txBody>
+          <a:bodyPr/>
+          <a:lstStyle/>
+          <a:p>
+            <a:fld id="{F7021451-1387-4CA6-816F-3879F97B5CBC}" type="slidenum">
+              <a:rPr lang="en-US"/>
+              <a:t>51</a:t>
             </a:fld>
             <a:endParaRPr lang="en-US"/>
           </a:p>
@@ -14080,7 +14169,7 @@
         <p:spPr>
           <a:xfrm>
             <a:off x="0" y="658368"/>
-            <a:ext cx="2468880" cy="5833872"/>
+            <a:ext cx="1463040" cy="5833872"/>
           </a:xfrm>
           <a:prstGeom prst="rect">
             <a:avLst/>
@@ -14095,8 +14184,8 @@
         </p:nvSpPr>
         <p:spPr>
           <a:xfrm>
-            <a:off x="2697480" y="1005840"/>
-            <a:ext cx="9174175" cy="731520"/>
+            <a:off x="1691640" y="1005840"/>
+            <a:ext cx="10180015" cy="731520"/>
           </a:xfrm>
           <a:prstGeom prst="rect">
             <a:avLst/>
@@ -14136,8 +14225,47 @@
         </p:nvSpPr>
         <p:spPr>
           <a:xfrm>
-            <a:off x="2697480" y="1783080"/>
-            <a:ext cx="9174175" cy="4663440"/>
+            <a:off x="1691640" y="1737360"/>
+            <a:ext cx="10180015" cy="457200"/>
+          </a:xfrm>
+          <a:prstGeom prst="rect">
+            <a:avLst/>
+          </a:prstGeom>
+          <a:noFill/>
+          <a:ln/>
+        </p:spPr>
+        <p:txBody>
+          <a:bodyPr wrap="square" lIns="0" tIns="0" rIns="0" bIns="0" rtlCol="0" anchor="ctr"/>
+          <a:lstStyle/>
+          <a:p>
+            <a:pPr algn="l" indent="0" marL="0">
+              <a:buNone/>
+            </a:pPr>
+            <a:r>
+              <a:rPr lang="en-US" sz="3200" b="1" dirty="0">
+                <a:solidFill>
+                  <a:srgbClr val="990011"/>
+                </a:solidFill>
+                <a:latin typeface="Times New Roman" pitchFamily="34" charset="0"/>
+                <a:ea typeface="Times New Roman" pitchFamily="34" charset="-122"/>
+                <a:cs typeface="Times New Roman" pitchFamily="34" charset="-120"/>
+              </a:rPr>
+              <a:t>A) Advantages for Growth</a:t>
+            </a:r>
+            <a:endParaRPr lang="en-US" sz="3200" dirty="0"/>
+          </a:p>
+        </p:txBody>
+      </p:sp>
+      <p:sp>
+        <p:nvSpPr>
+          <p:cNvPr id="6" name="Text 3"/>
+          <p:cNvSpPr/>
+          <p:nvPr/>
+        </p:nvSpPr>
+        <p:spPr>
+          <a:xfrm>
+            <a:off x="1691640" y="2240280"/>
+            <a:ext cx="10180015" cy="4206240"/>
           </a:xfrm>
           <a:prstGeom prst="rect">
             <a:avLst/>
@@ -14164,7 +14292,7 @@
                 <a:ea typeface="Times New Roman" pitchFamily="34" charset="-122"/>
                 <a:cs typeface="Times New Roman" pitchFamily="34" charset="-120"/>
               </a:rPr>
-              <a:t>The site and situation influenced growth as follows:</a:t>
+              <a:t>The site and situation helped Douala to grow in the following ways:</a:t>
             </a:r>
             <a:endParaRPr lang="en-US" sz="4000" dirty="0"/>
           </a:p>
@@ -14415,7 +14543,7 @@
                 <a:ea typeface="Times New Roman" pitchFamily="34" charset="-122"/>
                 <a:cs typeface="Times New Roman" pitchFamily="34" charset="-120"/>
               </a:rPr>
-              <a:t>2. Influence on the Growth of Douala (continued)</a:t>
+              <a:t>2. Influence on the Growth of Douala</a:t>
             </a:r>
             <a:endParaRPr lang="en-US" sz="3600" dirty="0"/>
           </a:p>
@@ -14429,8 +14557,47 @@
         </p:nvSpPr>
         <p:spPr>
           <a:xfrm>
-            <a:off x="5349240" y="1783080"/>
-            <a:ext cx="6522415" cy="4663440"/>
+            <a:off x="5349240" y="1737360"/>
+            <a:ext cx="6522415" cy="457200"/>
+          </a:xfrm>
+          <a:prstGeom prst="rect">
+            <a:avLst/>
+          </a:prstGeom>
+          <a:noFill/>
+          <a:ln/>
+        </p:spPr>
+        <p:txBody>
+          <a:bodyPr wrap="square" lIns="0" tIns="0" rIns="0" bIns="0" rtlCol="0" anchor="ctr"/>
+          <a:lstStyle/>
+          <a:p>
+            <a:pPr algn="l" indent="0" marL="0">
+              <a:buNone/>
+            </a:pPr>
+            <a:r>
+              <a:rPr lang="en-US" sz="2800" b="1" dirty="0">
+                <a:solidFill>
+                  <a:srgbClr val="990011"/>
+                </a:solidFill>
+                <a:latin typeface="Times New Roman" pitchFamily="34" charset="0"/>
+                <a:ea typeface="Times New Roman" pitchFamily="34" charset="-122"/>
+                <a:cs typeface="Times New Roman" pitchFamily="34" charset="-120"/>
+              </a:rPr>
+              <a:t>A) Advantages for Growth (continued)</a:t>
+            </a:r>
+            <a:endParaRPr lang="en-US" sz="2800" dirty="0"/>
+          </a:p>
+        </p:txBody>
+      </p:sp>
+      <p:sp>
+        <p:nvSpPr>
+          <p:cNvPr id="6" name="Text 3"/>
+          <p:cNvSpPr/>
+          <p:nvPr/>
+        </p:nvSpPr>
+        <p:spPr>
+          <a:xfrm>
+            <a:off x="5349240" y="2240280"/>
+            <a:ext cx="6522415" cy="4206240"/>
           </a:xfrm>
           <a:prstGeom prst="rect">
             <a:avLst/>
@@ -14475,43 +14642,6 @@
                 <a:cs typeface="Times New Roman" pitchFamily="34" charset="-120"/>
               </a:rPr>
               <a:t>Roads and the railway made Douala the gateway to the interior.</a:t>
-            </a:r>
-            <a:endParaRPr lang="en-US" sz="4000" dirty="0"/>
-          </a:p>
-          <a:p>
-            <a:pPr algn="l" indent="0" marL="0">
-              <a:spcAft>
-                <a:spcPts val="800"/>
-              </a:spcAft>
-              <a:buNone/>
-            </a:pPr>
-            <a:r>
-              <a:rPr lang="en-US" sz="4000" b="1" dirty="0">
-                <a:solidFill>
-                  <a:srgbClr val="111111"/>
-                </a:solidFill>
-                <a:latin typeface="Times New Roman" pitchFamily="34" charset="0"/>
-                <a:ea typeface="Times New Roman" pitchFamily="34" charset="-122"/>
-                <a:cs typeface="Times New Roman" pitchFamily="34" charset="-120"/>
-              </a:rPr>
-              <a:t>Problems: </a:t>
-            </a:r>
-            <a:pPr algn="l" indent="0" marL="0">
-              <a:spcAft>
-                <a:spcPts val="800"/>
-              </a:spcAft>
-              <a:buNone/>
-            </a:pPr>
-            <a:r>
-              <a:rPr lang="en-US" sz="4000" dirty="0">
-                <a:solidFill>
-                  <a:srgbClr val="111111"/>
-                </a:solidFill>
-                <a:latin typeface="Times New Roman" pitchFamily="34" charset="0"/>
-                <a:ea typeface="Times New Roman" pitchFamily="34" charset="-122"/>
-                <a:cs typeface="Times New Roman" pitchFamily="34" charset="-120"/>
-              </a:rPr>
-              <a:t>Floods, swamps and the silting of the channel limit growth.</a:t>
             </a:r>
             <a:endParaRPr lang="en-US" sz="4000" dirty="0"/>
           </a:p>
@@ -14862,7 +14992,7 @@
                 <a:ea typeface="Calibri" pitchFamily="34" charset="-122"/>
                 <a:cs typeface="Calibri" pitchFamily="34" charset="-120"/>
               </a:rPr>
-              <a:t>FORMATIVE EVALUATION</a:t>
+              <a:t>BOARD SUMMARY</a:t>
             </a:r>
             <a:endParaRPr lang="en-US" sz="1400" dirty="0"/>
           </a:p>
@@ -14885,7 +15015,7 @@
         <p:spPr>
           <a:xfrm>
             <a:off x="0" y="658368"/>
-            <a:ext cx="5120640" cy="5833872"/>
+            <a:ext cx="1463040" cy="5833872"/>
           </a:xfrm>
           <a:prstGeom prst="rect">
             <a:avLst/>
@@ -14900,8 +15030,8 @@
         </p:nvSpPr>
         <p:spPr>
           <a:xfrm>
-            <a:off x="5349240" y="1005840"/>
-            <a:ext cx="6522415" cy="731520"/>
+            <a:off x="1691640" y="1005840"/>
+            <a:ext cx="10180015" cy="731520"/>
           </a:xfrm>
           <a:prstGeom prst="rect">
             <a:avLst/>
@@ -14927,7 +15057,7 @@
                 <a:ea typeface="Times New Roman" pitchFamily="34" charset="-122"/>
                 <a:cs typeface="Times New Roman" pitchFamily="34" charset="-120"/>
               </a:rPr>
-              <a:t>Evaluation 1</a:t>
+              <a:t>2. Influence on the Growth of Douala</a:t>
             </a:r>
             <a:endParaRPr lang="en-US" sz="3600" dirty="0"/>
           </a:p>
@@ -14941,8 +15071,47 @@
         </p:nvSpPr>
         <p:spPr>
           <a:xfrm>
-            <a:off x="5349240" y="1783080"/>
-            <a:ext cx="6522415" cy="4663440"/>
+            <a:off x="1691640" y="1737360"/>
+            <a:ext cx="10180015" cy="457200"/>
+          </a:xfrm>
+          <a:prstGeom prst="rect">
+            <a:avLst/>
+          </a:prstGeom>
+          <a:noFill/>
+          <a:ln/>
+        </p:spPr>
+        <p:txBody>
+          <a:bodyPr wrap="square" lIns="0" tIns="0" rIns="0" bIns="0" rtlCol="0" anchor="ctr"/>
+          <a:lstStyle/>
+          <a:p>
+            <a:pPr algn="l" indent="0" marL="0">
+              <a:buNone/>
+            </a:pPr>
+            <a:r>
+              <a:rPr lang="en-US" sz="3200" b="1" dirty="0">
+                <a:solidFill>
+                  <a:srgbClr val="990011"/>
+                </a:solidFill>
+                <a:latin typeface="Times New Roman" pitchFamily="34" charset="0"/>
+                <a:ea typeface="Times New Roman" pitchFamily="34" charset="-122"/>
+                <a:cs typeface="Times New Roman" pitchFamily="34" charset="-120"/>
+              </a:rPr>
+              <a:t>B) Limits to Growth</a:t>
+            </a:r>
+            <a:endParaRPr lang="en-US" sz="3200" dirty="0"/>
+          </a:p>
+        </p:txBody>
+      </p:sp>
+      <p:sp>
+        <p:nvSpPr>
+          <p:cNvPr id="6" name="Text 3"/>
+          <p:cNvSpPr/>
+          <p:nvPr/>
+        </p:nvSpPr>
+        <p:spPr>
+          <a:xfrm>
+            <a:off x="1691640" y="2240280"/>
+            <a:ext cx="10180015" cy="4206240"/>
           </a:xfrm>
           <a:prstGeom prst="rect">
             <a:avLst/>
@@ -14961,7 +15130,7 @@
               <a:buNone/>
             </a:pPr>
             <a:r>
-              <a:rPr lang="en-US" sz="4000" dirty="0">
+              <a:rPr lang="en-US" sz="4000" i="1" dirty="0">
                 <a:solidFill>
                   <a:srgbClr val="111111"/>
                 </a:solidFill>
@@ -14969,7 +15138,118 @@
                 <a:ea typeface="Times New Roman" pitchFamily="34" charset="-122"/>
                 <a:cs typeface="Times New Roman" pitchFamily="34" charset="-120"/>
               </a:rPr>
-              <a:t>Describe the site of Douala.</a:t>
+              <a:t>The site limits the growth of Douala in the following ways:</a:t>
+            </a:r>
+            <a:endParaRPr lang="en-US" sz="4000" dirty="0"/>
+          </a:p>
+          <a:p>
+            <a:pPr algn="l" indent="0" marL="0">
+              <a:spcAft>
+                <a:spcPts val="800"/>
+              </a:spcAft>
+              <a:buNone/>
+            </a:pPr>
+            <a:r>
+              <a:rPr lang="en-US" sz="4000" b="1" dirty="0">
+                <a:solidFill>
+                  <a:srgbClr val="111111"/>
+                </a:solidFill>
+                <a:latin typeface="Times New Roman" pitchFamily="34" charset="0"/>
+                <a:ea typeface="Times New Roman" pitchFamily="34" charset="-122"/>
+                <a:cs typeface="Times New Roman" pitchFamily="34" charset="-120"/>
+              </a:rPr>
+              <a:t>Floods: </a:t>
+            </a:r>
+            <a:pPr algn="l" indent="0" marL="0">
+              <a:spcAft>
+                <a:spcPts val="800"/>
+              </a:spcAft>
+              <a:buNone/>
+            </a:pPr>
+            <a:r>
+              <a:rPr lang="en-US" sz="4000" dirty="0">
+                <a:solidFill>
+                  <a:srgbClr val="111111"/>
+                </a:solidFill>
+                <a:latin typeface="Times New Roman" pitchFamily="34" charset="0"/>
+                <a:ea typeface="Times New Roman" pitchFamily="34" charset="-122"/>
+                <a:cs typeface="Times New Roman" pitchFamily="34" charset="-120"/>
+              </a:rPr>
+              <a:t>Low quarters are often flooded.</a:t>
+            </a:r>
+            <a:endParaRPr lang="en-US" sz="4000" dirty="0"/>
+          </a:p>
+          <a:p>
+            <a:pPr algn="l" indent="0" marL="0">
+              <a:spcAft>
+                <a:spcPts val="800"/>
+              </a:spcAft>
+              <a:buNone/>
+            </a:pPr>
+            <a:r>
+              <a:rPr lang="en-US" sz="4000" b="1" dirty="0">
+                <a:solidFill>
+                  <a:srgbClr val="111111"/>
+                </a:solidFill>
+                <a:latin typeface="Times New Roman" pitchFamily="34" charset="0"/>
+                <a:ea typeface="Times New Roman" pitchFamily="34" charset="-122"/>
+                <a:cs typeface="Times New Roman" pitchFamily="34" charset="-120"/>
+              </a:rPr>
+              <a:t>Swamps: </a:t>
+            </a:r>
+            <a:pPr algn="l" indent="0" marL="0">
+              <a:spcAft>
+                <a:spcPts val="800"/>
+              </a:spcAft>
+              <a:buNone/>
+            </a:pPr>
+            <a:r>
+              <a:rPr lang="en-US" sz="4000" dirty="0">
+                <a:solidFill>
+                  <a:srgbClr val="111111"/>
+                </a:solidFill>
+                <a:latin typeface="Times New Roman" pitchFamily="34" charset="0"/>
+                <a:ea typeface="Times New Roman" pitchFamily="34" charset="-122"/>
+                <a:cs typeface="Times New Roman" pitchFamily="34" charset="-120"/>
+              </a:rPr>
+              <a:t>Wet land is difficult to build on.</a:t>
+            </a:r>
+            <a:endParaRPr lang="en-US" sz="4000" dirty="0"/>
+          </a:p>
+          <a:p>
+            <a:pPr algn="l" indent="0" marL="0">
+              <a:spcAft>
+                <a:spcPts val="800"/>
+              </a:spcAft>
+              <a:buNone/>
+            </a:pPr>
+            <a:r>
+              <a:rPr lang="en-US" sz="4000" b="1" dirty="0">
+                <a:solidFill>
+                  <a:srgbClr val="111111"/>
+                </a:solidFill>
+                <a:latin typeface="Times New Roman" pitchFamily="34" charset="0"/>
+                <a:ea typeface="Times New Roman" pitchFamily="34" charset="-122"/>
+                <a:cs typeface="Times New Roman" pitchFamily="34" charset="-120"/>
+              </a:rPr>
+              <a:t>Silting of the channel: </a:t>
+            </a:r>
+            <a:pPr algn="l" indent="0" marL="0">
+              <a:spcAft>
+                <a:spcPts val="800"/>
+              </a:spcAft>
+              <a:buNone/>
+            </a:pPr>
+            <a:r>
+              <a:rPr lang="en-US" sz="4000" dirty="0">
+                <a:solidFill>
+                  <a:srgbClr val="111111"/>
+                </a:solidFill>
+                <a:latin typeface="Times New Roman" pitchFamily="34" charset="0"/>
+                <a:ea typeface="Times New Roman" pitchFamily="34" charset="-122"/>
+                <a:cs typeface="Times New Roman" pitchFamily="34" charset="-120"/>
+              </a:rPr>
+              <a:t>Mud makes the port less deep.</a:t>
             </a:r>
             <a:endParaRPr lang="en-US" sz="4000" dirty="0"/>
           </a:p>
@@ -15146,7 +15426,7 @@
                 <a:ea typeface="Times New Roman" pitchFamily="34" charset="-122"/>
                 <a:cs typeface="Times New Roman" pitchFamily="34" charset="-120"/>
               </a:rPr>
-              <a:t>Expected Answer</a:t>
+              <a:t>Evaluation 1</a:t>
             </a:r>
             <a:endParaRPr lang="en-US" sz="3600" dirty="0"/>
           </a:p>
@@ -15188,7 +15468,7 @@
                 <a:ea typeface="Times New Roman" pitchFamily="34" charset="-122"/>
                 <a:cs typeface="Times New Roman" pitchFamily="34" charset="-120"/>
               </a:rPr>
-              <a:t>Low, flat land on the banks of the Wouri estuary.</a:t>
+              <a:t>Describe the site of Douala.</a:t>
             </a:r>
             <a:endParaRPr lang="en-US" sz="4000" dirty="0"/>
           </a:p>
@@ -15365,7 +15645,7 @@
                 <a:ea typeface="Times New Roman" pitchFamily="34" charset="-122"/>
                 <a:cs typeface="Times New Roman" pitchFamily="34" charset="-120"/>
               </a:rPr>
-              <a:t>Evaluation 2</a:t>
+              <a:t>Expected Answer</a:t>
             </a:r>
             <a:endParaRPr lang="en-US" sz="3600" dirty="0"/>
           </a:p>
@@ -15407,7 +15687,7 @@
                 <a:ea typeface="Times New Roman" pitchFamily="34" charset="-122"/>
                 <a:cs typeface="Times New Roman" pitchFamily="34" charset="-120"/>
               </a:rPr>
-              <a:t>Give two ways the situation helped Douala grow.</a:t>
+              <a:t>Low, flat land on the banks of the Wouri estuary.</a:t>
             </a:r>
             <a:endParaRPr lang="en-US" sz="4000" dirty="0"/>
           </a:p>
@@ -15584,7 +15864,7 @@
                 <a:ea typeface="Times New Roman" pitchFamily="34" charset="-122"/>
                 <a:cs typeface="Times New Roman" pitchFamily="34" charset="-120"/>
               </a:rPr>
-              <a:t>Expected Answer</a:t>
+              <a:t>Evaluation 2</a:t>
             </a:r>
             <a:endParaRPr lang="en-US" sz="3600" dirty="0"/>
           </a:p>
@@ -15626,7 +15906,7 @@
                 <a:ea typeface="Times New Roman" pitchFamily="34" charset="-122"/>
                 <a:cs typeface="Times New Roman" pitchFamily="34" charset="-120"/>
               </a:rPr>
-              <a:t>Its port and its routes to the interior.</a:t>
+              <a:t>Give two ways the situation helped Douala grow.</a:t>
             </a:r>
             <a:endParaRPr lang="en-US" sz="4000" dirty="0"/>
           </a:p>
@@ -15738,7 +16018,7 @@
                 <a:ea typeface="Calibri" pitchFamily="34" charset="-122"/>
                 <a:cs typeface="Calibri" pitchFamily="34" charset="-120"/>
               </a:rPr>
-              <a:t>REMEDIATION</a:t>
+              <a:t>FORMATIVE EVALUATION</a:t>
             </a:r>
             <a:endParaRPr lang="en-US" sz="1400" dirty="0"/>
           </a:p>
@@ -15761,7 +16041,7 @@
         <p:spPr>
           <a:xfrm>
             <a:off x="0" y="658368"/>
-            <a:ext cx="3840480" cy="5833872"/>
+            <a:ext cx="5120640" cy="5833872"/>
           </a:xfrm>
           <a:prstGeom prst="rect">
             <a:avLst/>
@@ -15776,8 +16056,8 @@
         </p:nvSpPr>
         <p:spPr>
           <a:xfrm>
-            <a:off x="4069080" y="1005840"/>
-            <a:ext cx="7802575" cy="731520"/>
+            <a:off x="5349240" y="1005840"/>
+            <a:ext cx="6522415" cy="731520"/>
           </a:xfrm>
           <a:prstGeom prst="rect">
             <a:avLst/>
@@ -15803,7 +16083,7 @@
                 <a:ea typeface="Times New Roman" pitchFamily="34" charset="-122"/>
                 <a:cs typeface="Times New Roman" pitchFamily="34" charset="-120"/>
               </a:rPr>
-              <a:t>Remediation</a:t>
+              <a:t>Expected Answer</a:t>
             </a:r>
             <a:endParaRPr lang="en-US" sz="3600" dirty="0"/>
           </a:p>
@@ -15817,8 +16097,8 @@
         </p:nvSpPr>
         <p:spPr>
           <a:xfrm>
-            <a:off x="4069080" y="1783080"/>
-            <a:ext cx="7802575" cy="4663440"/>
+            <a:off x="5349240" y="1783080"/>
+            <a:ext cx="6522415" cy="4663440"/>
           </a:xfrm>
           <a:prstGeom prst="rect">
             <a:avLst/>
@@ -15837,7 +16117,7 @@
               <a:buNone/>
             </a:pPr>
             <a:r>
-              <a:rPr lang="en-US" sz="4000" b="1" dirty="0">
+              <a:rPr lang="en-US" sz="4000" dirty="0">
                 <a:solidFill>
                   <a:srgbClr val="111111"/>
                 </a:solidFill>
@@ -15845,73 +16125,7 @@
                 <a:ea typeface="Times New Roman" pitchFamily="34" charset="-122"/>
                 <a:cs typeface="Times New Roman" pitchFamily="34" charset="-120"/>
               </a:rPr>
-              <a:t>Fill in the blanks:</a:t>
-            </a:r>
-            <a:endParaRPr lang="en-US" sz="4000" dirty="0"/>
-          </a:p>
-          <a:p>
-            <a:pPr algn="l" marL="342900" indent="-342900">
-              <a:spcAft>
-                <a:spcPts val="800"/>
-              </a:spcAft>
-              <a:buSzPct val="100000"/>
-              <a:buFont typeface="+mj-lt"/>
-              <a:buAutoNum type="arabicPeriod" startAt="1"/>
-            </a:pPr>
-            <a:r>
-              <a:rPr lang="en-US" sz="4000" dirty="0">
-                <a:solidFill>
-                  <a:srgbClr val="111111"/>
-                </a:solidFill>
-                <a:latin typeface="Times New Roman" pitchFamily="34" charset="0"/>
-                <a:ea typeface="Times New Roman" pitchFamily="34" charset="-122"/>
-                <a:cs typeface="Times New Roman" pitchFamily="34" charset="-120"/>
-              </a:rPr>
-              <a:t>Douala is on the ______ estuary.</a:t>
-            </a:r>
-            <a:endParaRPr lang="en-US" sz="4000" dirty="0"/>
-          </a:p>
-          <a:p>
-            <a:pPr algn="l" marL="342900" indent="-342900">
-              <a:spcAft>
-                <a:spcPts val="800"/>
-              </a:spcAft>
-              <a:buSzPct val="100000"/>
-              <a:buFont typeface="+mj-lt"/>
-              <a:buAutoNum type="arabicPeriod" startAt="1"/>
-            </a:pPr>
-            <a:r>
-              <a:rPr lang="en-US" sz="4000" dirty="0">
-                <a:solidFill>
-                  <a:srgbClr val="111111"/>
-                </a:solidFill>
-                <a:latin typeface="Times New Roman" pitchFamily="34" charset="0"/>
-                <a:ea typeface="Times New Roman" pitchFamily="34" charset="-122"/>
-                <a:cs typeface="Times New Roman" pitchFamily="34" charset="-120"/>
-              </a:rPr>
-              <a:t>Douala on the right bank is called ______.</a:t>
-            </a:r>
-            <a:endParaRPr lang="en-US" sz="4000" dirty="0"/>
-          </a:p>
-          <a:p>
-            <a:pPr algn="l" marL="342900" indent="-342900">
-              <a:spcAft>
-                <a:spcPts val="800"/>
-              </a:spcAft>
-              <a:buSzPct val="100000"/>
-              <a:buFont typeface="+mj-lt"/>
-              <a:buAutoNum type="arabicPeriod" startAt="1"/>
-            </a:pPr>
-            <a:r>
-              <a:rPr lang="en-US" sz="4000" dirty="0">
-                <a:solidFill>
-                  <a:srgbClr val="111111"/>
-                </a:solidFill>
-                <a:latin typeface="Times New Roman" pitchFamily="34" charset="0"/>
-                <a:ea typeface="Times New Roman" pitchFamily="34" charset="-122"/>
-                <a:cs typeface="Times New Roman" pitchFamily="34" charset="-120"/>
-              </a:rPr>
-              <a:t>The main problem of the site is ______.</a:t>
+              <a:t>Its port and its routes to the interior.</a:t>
             </a:r>
             <a:endParaRPr lang="en-US" sz="4000" dirty="0"/>
           </a:p>
@@ -16023,7 +16237,7 @@
                 <a:ea typeface="Calibri" pitchFamily="34" charset="-122"/>
                 <a:cs typeface="Calibri" pitchFamily="34" charset="-120"/>
               </a:rPr>
-              <a:t>HOMEWORK</a:t>
+              <a:t>REMEDIATION</a:t>
             </a:r>
             <a:endParaRPr lang="en-US" sz="1400" dirty="0"/>
           </a:p>
@@ -16046,7 +16260,7 @@
         <p:spPr>
           <a:xfrm>
             <a:off x="0" y="658368"/>
-            <a:ext cx="5120640" cy="5833872"/>
+            <a:ext cx="3840480" cy="5833872"/>
           </a:xfrm>
           <a:prstGeom prst="rect">
             <a:avLst/>
@@ -16061,8 +16275,8 @@
         </p:nvSpPr>
         <p:spPr>
           <a:xfrm>
-            <a:off x="5349240" y="1005840"/>
-            <a:ext cx="6522415" cy="731520"/>
+            <a:off x="4069080" y="1005840"/>
+            <a:ext cx="7802575" cy="731520"/>
           </a:xfrm>
           <a:prstGeom prst="rect">
             <a:avLst/>
@@ -16088,7 +16302,7 @@
                 <a:ea typeface="Times New Roman" pitchFamily="34" charset="-122"/>
                 <a:cs typeface="Times New Roman" pitchFamily="34" charset="-120"/>
               </a:rPr>
-              <a:t>Homework</a:t>
+              <a:t>Remediation</a:t>
             </a:r>
             <a:endParaRPr lang="en-US" sz="3600" dirty="0"/>
           </a:p>
@@ -16102,8 +16316,8 @@
         </p:nvSpPr>
         <p:spPr>
           <a:xfrm>
-            <a:off x="5349240" y="1783080"/>
-            <a:ext cx="6522415" cy="4663440"/>
+            <a:off x="4069080" y="1783080"/>
+            <a:ext cx="7802575" cy="4663440"/>
           </a:xfrm>
           <a:prstGeom prst="rect">
             <a:avLst/>
@@ -16122,7 +16336,7 @@
               <a:buNone/>
             </a:pPr>
             <a:r>
-              <a:rPr lang="en-US" sz="4000" dirty="0">
+              <a:rPr lang="en-US" sz="4000" b="1" dirty="0">
                 <a:solidFill>
                   <a:srgbClr val="111111"/>
                 </a:solidFill>
@@ -16130,7 +16344,73 @@
                 <a:ea typeface="Times New Roman" pitchFamily="34" charset="-122"/>
                 <a:cs typeface="Times New Roman" pitchFamily="34" charset="-120"/>
               </a:rPr>
-              <a:t>Draw a labelled diagram of the site and situation of Douala.</a:t>
+              <a:t>Fill in the blanks:</a:t>
+            </a:r>
+            <a:endParaRPr lang="en-US" sz="4000" dirty="0"/>
+          </a:p>
+          <a:p>
+            <a:pPr algn="l" marL="342900" indent="-342900">
+              <a:spcAft>
+                <a:spcPts val="800"/>
+              </a:spcAft>
+              <a:buSzPct val="100000"/>
+              <a:buFont typeface="+mj-lt"/>
+              <a:buAutoNum type="arabicPeriod" startAt="1"/>
+            </a:pPr>
+            <a:r>
+              <a:rPr lang="en-US" sz="4000" dirty="0">
+                <a:solidFill>
+                  <a:srgbClr val="111111"/>
+                </a:solidFill>
+                <a:latin typeface="Times New Roman" pitchFamily="34" charset="0"/>
+                <a:ea typeface="Times New Roman" pitchFamily="34" charset="-122"/>
+                <a:cs typeface="Times New Roman" pitchFamily="34" charset="-120"/>
+              </a:rPr>
+              <a:t>Douala is on the ______ estuary.</a:t>
+            </a:r>
+            <a:endParaRPr lang="en-US" sz="4000" dirty="0"/>
+          </a:p>
+          <a:p>
+            <a:pPr algn="l" marL="342900" indent="-342900">
+              <a:spcAft>
+                <a:spcPts val="800"/>
+              </a:spcAft>
+              <a:buSzPct val="100000"/>
+              <a:buFont typeface="+mj-lt"/>
+              <a:buAutoNum type="arabicPeriod" startAt="1"/>
+            </a:pPr>
+            <a:r>
+              <a:rPr lang="en-US" sz="4000" dirty="0">
+                <a:solidFill>
+                  <a:srgbClr val="111111"/>
+                </a:solidFill>
+                <a:latin typeface="Times New Roman" pitchFamily="34" charset="0"/>
+                <a:ea typeface="Times New Roman" pitchFamily="34" charset="-122"/>
+                <a:cs typeface="Times New Roman" pitchFamily="34" charset="-120"/>
+              </a:rPr>
+              <a:t>Douala on the right bank is called ______.</a:t>
+            </a:r>
+            <a:endParaRPr lang="en-US" sz="4000" dirty="0"/>
+          </a:p>
+          <a:p>
+            <a:pPr algn="l" marL="342900" indent="-342900">
+              <a:spcAft>
+                <a:spcPts val="800"/>
+              </a:spcAft>
+              <a:buSzPct val="100000"/>
+              <a:buFont typeface="+mj-lt"/>
+              <a:buAutoNum type="arabicPeriod" startAt="1"/>
+            </a:pPr>
+            <a:r>
+              <a:rPr lang="en-US" sz="4000" dirty="0">
+                <a:solidFill>
+                  <a:srgbClr val="111111"/>
+                </a:solidFill>
+                <a:latin typeface="Times New Roman" pitchFamily="34" charset="0"/>
+                <a:ea typeface="Times New Roman" pitchFamily="34" charset="-122"/>
+                <a:cs typeface="Times New Roman" pitchFamily="34" charset="-120"/>
+              </a:rPr>
+              <a:t>The main problem of the site is ______.</a:t>
             </a:r>
             <a:endParaRPr lang="en-US" sz="4000" dirty="0"/>
           </a:p>
@@ -16242,6 +16522,225 @@
                 <a:ea typeface="Calibri" pitchFamily="34" charset="-122"/>
                 <a:cs typeface="Calibri" pitchFamily="34" charset="-120"/>
               </a:rPr>
+              <a:t>HOMEWORK</a:t>
+            </a:r>
+            <a:endParaRPr lang="en-US" sz="1400" dirty="0"/>
+          </a:p>
+        </p:txBody>
+      </p:sp>
+      <p:pic>
+        <p:nvPicPr>
+          <p:cNvPr id="3" name="Image 0" descr="/home/claude/f4/img/minesec_sheet.png">    </p:cNvPr>
+          <p:cNvPicPr>
+            <a:picLocks noChangeAspect="1"/>
+          </p:cNvPicPr>
+          <p:nvPr/>
+        </p:nvPicPr>
+        <p:blipFill>
+          <a:blip r:embed="rId1"/>
+          <a:stretch>
+            <a:fillRect/>
+          </a:stretch>
+        </p:blipFill>
+        <p:spPr>
+          <a:xfrm>
+            <a:off x="0" y="658368"/>
+            <a:ext cx="5120640" cy="5833872"/>
+          </a:xfrm>
+          <a:prstGeom prst="rect">
+            <a:avLst/>
+          </a:prstGeom>
+        </p:spPr>
+      </p:pic>
+      <p:sp>
+        <p:nvSpPr>
+          <p:cNvPr id="4" name="Text 1"/>
+          <p:cNvSpPr/>
+          <p:nvPr/>
+        </p:nvSpPr>
+        <p:spPr>
+          <a:xfrm>
+            <a:off x="5349240" y="1005840"/>
+            <a:ext cx="6522415" cy="731520"/>
+          </a:xfrm>
+          <a:prstGeom prst="rect">
+            <a:avLst/>
+          </a:prstGeom>
+          <a:noFill/>
+          <a:ln/>
+        </p:spPr>
+        <p:txBody>
+          <a:bodyPr wrap="square" lIns="0" tIns="0" rIns="0" bIns="0" rtlCol="0" anchor="ctr">
+            <a:normAutofit/>
+          </a:bodyPr>
+          <a:lstStyle/>
+          <a:p>
+            <a:pPr algn="ctr" indent="0" marL="0">
+              <a:buNone/>
+            </a:pPr>
+            <a:r>
+              <a:rPr lang="en-US" sz="3600" b="1" dirty="0">
+                <a:solidFill>
+                  <a:srgbClr val="990011"/>
+                </a:solidFill>
+                <a:latin typeface="Times New Roman" pitchFamily="34" charset="0"/>
+                <a:ea typeface="Times New Roman" pitchFamily="34" charset="-122"/>
+                <a:cs typeface="Times New Roman" pitchFamily="34" charset="-120"/>
+              </a:rPr>
+              <a:t>Homework</a:t>
+            </a:r>
+            <a:endParaRPr lang="en-US" sz="3600" dirty="0"/>
+          </a:p>
+        </p:txBody>
+      </p:sp>
+      <p:sp>
+        <p:nvSpPr>
+          <p:cNvPr id="5" name="Text 2"/>
+          <p:cNvSpPr/>
+          <p:nvPr/>
+        </p:nvSpPr>
+        <p:spPr>
+          <a:xfrm>
+            <a:off x="5349240" y="1783080"/>
+            <a:ext cx="6522415" cy="4663440"/>
+          </a:xfrm>
+          <a:prstGeom prst="rect">
+            <a:avLst/>
+          </a:prstGeom>
+          <a:noFill/>
+          <a:ln/>
+        </p:spPr>
+        <p:txBody>
+          <a:bodyPr wrap="square" lIns="0" tIns="0" rIns="0" bIns="0" rtlCol="0" anchor="t"/>
+          <a:lstStyle/>
+          <a:p>
+            <a:pPr algn="l" indent="0" marL="0">
+              <a:spcAft>
+                <a:spcPts val="800"/>
+              </a:spcAft>
+              <a:buNone/>
+            </a:pPr>
+            <a:r>
+              <a:rPr lang="en-US" sz="4000" dirty="0">
+                <a:solidFill>
+                  <a:srgbClr val="111111"/>
+                </a:solidFill>
+                <a:latin typeface="Times New Roman" pitchFamily="34" charset="0"/>
+                <a:ea typeface="Times New Roman" pitchFamily="34" charset="-122"/>
+                <a:cs typeface="Times New Roman" pitchFamily="34" charset="-120"/>
+              </a:rPr>
+              <a:t>Draw a labelled diagram of the site and situation of Douala.</a:t>
+            </a:r>
+            <a:endParaRPr lang="en-US" sz="4000" dirty="0"/>
+          </a:p>
+        </p:txBody>
+      </p:sp>
+      <p:sp>
+        <p:nvSpPr>
+          <p:cNvPr id="25" name="Slide Number Placeholder 0"/>
+          <p:cNvSpPr>
+            <a:spLocks noGrp="1"/>
+          </p:cNvSpPr>
+          <p:nvPr>
+            <p:ph type="sldNum" sz="quarter" idx="4294967295"/>
+          </p:nvPr>
+        </p:nvSpPr>
+        <p:spPr>
+          <a:xfrm>
+            <a:off x="27432" y="91440"/>
+            <a:ext cx="585216" cy="475488"/>
+          </a:xfrm>
+          <a:prstGeom prst="rect">
+            <a:avLst/>
+          </a:prstGeom>
+          <a:extLst>
+            <a:ext uri="{C572A759-6A51-4108-AA02-DFA0A04FC94B}">
+              <ma14:wrappingTextBoxFlag xmlns:ma14="http://schemas.microsoft.com/office/mac/drawingml/2011/main" val="0"/>
+            </a:ext>
+          </a:extLst>
+        </p:spPr>
+        <p:txBody>
+          <a:bodyPr/>
+          <a:lstStyle>
+            <a:lvl1pPr>
+              <a:defRPr sz="2000">
+                <a:solidFill>
+                  <a:srgbClr val="FFFFFF"/>
+                </a:solidFill>
+                <a:latin typeface="Calibri"/>
+                <a:ea typeface="Calibri"/>
+                <a:cs typeface="Calibri"/>
+              </a:defRPr>
+            </a:lvl1pPr>
+          </a:lstStyle>
+          <a:p>
+            <a:pPr algn="ctr"/>
+            <a:fld id="{F7021451-1387-4CA6-816F-3879F97B5CBC}" type="slidenum">
+              <a:rPr b="1" lang="en-US"/>
+              <a:t>46</a:t>
+            </a:fld>
+            <a:endParaRPr lang="en-US"/>
+          </a:p>
+        </p:txBody>
+      </p:sp>
+    </p:spTree>
+  </p:cSld>
+  <p:clrMapOvr>
+    <a:masterClrMapping/>
+  </p:clrMapOvr>
+</p:sld>
+</file>
+
+<file path=ppt/slides/slide47.xml><?xml version="1.0" encoding="utf-8"?>
+<p:sld xmlns:a="http://schemas.openxmlformats.org/drawingml/2006/main" xmlns:r="http://schemas.openxmlformats.org/officeDocument/2006/relationships" xmlns:p="http://schemas.openxmlformats.org/presentationml/2006/main">
+  <p:cSld name="Slide 47">
+    <p:spTree>
+      <p:nvGrpSpPr>
+        <p:cNvPr id="1" name=""/>
+        <p:cNvGrpSpPr/>
+        <p:nvPr/>
+      </p:nvGrpSpPr>
+      <p:grpSpPr>
+        <a:xfrm>
+          <a:off x="0" y="0"/>
+          <a:ext cx="0" cy="0"/>
+          <a:chOff x="0" y="0"/>
+          <a:chExt cx="0" cy="0"/>
+        </a:xfrm>
+      </p:grpSpPr>
+      <p:sp>
+        <p:nvSpPr>
+          <p:cNvPr id="2" name="Text 0"/>
+          <p:cNvSpPr/>
+          <p:nvPr/>
+        </p:nvSpPr>
+        <p:spPr>
+          <a:xfrm>
+            <a:off x="457200" y="713232"/>
+            <a:ext cx="11368735" cy="274320"/>
+          </a:xfrm>
+          <a:prstGeom prst="rect">
+            <a:avLst/>
+          </a:prstGeom>
+          <a:noFill/>
+          <a:ln/>
+        </p:spPr>
+        <p:txBody>
+          <a:bodyPr wrap="square" lIns="0" tIns="0" rIns="0" bIns="0" rtlCol="0" anchor="ctr"/>
+          <a:lstStyle/>
+          <a:p>
+            <a:pPr algn="r" indent="0" marL="0">
+              <a:buNone/>
+            </a:pPr>
+            <a:r>
+              <a:rPr lang="en-US" sz="1400" b="1" dirty="0">
+                <a:solidFill>
+                  <a:srgbClr val="1C3F6E"/>
+                </a:solidFill>
+                <a:latin typeface="Calibri" pitchFamily="34" charset="0"/>
+                <a:ea typeface="Calibri" pitchFamily="34" charset="-122"/>
+                <a:cs typeface="Calibri" pitchFamily="34" charset="-120"/>
+              </a:rPr>
               <a:t>BILINGUAL GAME</a:t>
             </a:r>
             <a:endParaRPr lang="en-US" sz="1400" dirty="0"/>
@@ -16289,7 +16788,7 @@
       </p:sp>
       <p:graphicFrame>
         <p:nvGraphicFramePr>
-          <p:cNvPr id="47" name="Table 0"/>
+          <p:cNvPr id="48" name="Table 0"/>
           <p:cNvGraphicFramePr>
             <a:graphicFrameLocks noGrp="1"/>
           </p:cNvGraphicFramePr>
@@ -17325,7 +17824,7 @@
             <a:pPr algn="ctr"/>
             <a:fld id="{F7021451-1387-4CA6-816F-3879F97B5CBC}" type="slidenum">
               <a:rPr b="1" lang="en-US"/>
-              <a:t>46</a:t>
+              <a:t>47</a:t>
             </a:fld>
             <a:endParaRPr lang="en-US"/>
           </a:p>
@@ -17339,9 +17838,9 @@
 </p:sld>
 </file>
 
-<file path=ppt/slides/slide47.xml><?xml version="1.0" encoding="utf-8"?>
+<file path=ppt/slides/slide48.xml><?xml version="1.0" encoding="utf-8"?>
 <p:sld xmlns:a="http://schemas.openxmlformats.org/drawingml/2006/main" xmlns:r="http://schemas.openxmlformats.org/officeDocument/2006/relationships" xmlns:p="http://schemas.openxmlformats.org/presentationml/2006/main">
-  <p:cSld name="Slide 47">
+  <p:cSld name="Slide 48">
     <p:spTree>
       <p:nvGrpSpPr>
         <p:cNvPr id="1" name=""/>
@@ -17436,7 +17935,7 @@
       </p:sp>
       <p:graphicFrame>
         <p:nvGraphicFramePr>
-          <p:cNvPr id="48" name="Table 0"/>
+          <p:cNvPr id="49" name="Table 0"/>
           <p:cNvGraphicFramePr>
             <a:graphicFrameLocks noGrp="1"/>
           </p:cNvGraphicFramePr>
@@ -18058,7 +18557,7 @@
             <a:pPr algn="ctr"/>
             <a:fld id="{F7021451-1387-4CA6-816F-3879F97B5CBC}" type="slidenum">
               <a:rPr b="1" lang="en-US"/>
-              <a:t>47</a:t>
+              <a:t>48</a:t>
             </a:fld>
             <a:endParaRPr lang="en-US"/>
           </a:p>
@@ -18072,9 +18571,9 @@
 </p:sld>
 </file>
 
-<file path=ppt/slides/slide48.xml><?xml version="1.0" encoding="utf-8"?>
+<file path=ppt/slides/slide49.xml><?xml version="1.0" encoding="utf-8"?>
 <p:sld xmlns:a="http://schemas.openxmlformats.org/drawingml/2006/main" xmlns:r="http://schemas.openxmlformats.org/officeDocument/2006/relationships" xmlns:p="http://schemas.openxmlformats.org/presentationml/2006/main">
-  <p:cSld name="Slide 48">
+  <p:cSld name="Slide 49">
     <p:spTree>
       <p:nvGrpSpPr>
         <p:cNvPr id="1" name=""/>
@@ -18169,7 +18668,7 @@
       </p:sp>
       <p:graphicFrame>
         <p:nvGraphicFramePr>
-          <p:cNvPr id="49" name="Table 0"/>
+          <p:cNvPr id="50" name="Table 0"/>
           <p:cNvGraphicFramePr>
             <a:graphicFrameLocks noGrp="1"/>
           </p:cNvGraphicFramePr>
@@ -18279,7 +18778,7 @@
                           <a:ea typeface="Calibri" pitchFamily="34" charset="-122"/>
                           <a:cs typeface="Calibri" pitchFamily="34" charset="-120"/>
                         </a:rPr>
-                        <a:t>Site and Situation of Douala; Influence on the Growth of Douala.</a:t>
+                        <a:t>Site and Situation of Douala; Advantages for Growth; Limits to Growth.</a:t>
                       </a:r>
                       <a:endParaRPr lang="en-US" sz="1600" dirty="0">
                         <a:latin typeface="Calibri" charset="0"/>
@@ -18929,331 +19428,6 @@
             <a:pPr algn="ctr"/>
             <a:fld id="{F7021451-1387-4CA6-816F-3879F97B5CBC}" type="slidenum">
               <a:rPr b="1" lang="en-US"/>
-              <a:t>48</a:t>
-            </a:fld>
-            <a:endParaRPr lang="en-US"/>
-          </a:p>
-        </p:txBody>
-      </p:sp>
-    </p:spTree>
-  </p:cSld>
-  <p:clrMapOvr>
-    <a:masterClrMapping/>
-  </p:clrMapOvr>
-</p:sld>
-</file>
-
-<file path=ppt/slides/slide49.xml><?xml version="1.0" encoding="utf-8"?>
-<p:sld xmlns:a="http://schemas.openxmlformats.org/drawingml/2006/main" xmlns:r="http://schemas.openxmlformats.org/officeDocument/2006/relationships" xmlns:p="http://schemas.openxmlformats.org/presentationml/2006/main">
-  <p:cSld name="Slide 49">
-    <p:spTree>
-      <p:nvGrpSpPr>
-        <p:cNvPr id="1" name=""/>
-        <p:cNvGrpSpPr/>
-        <p:nvPr/>
-      </p:nvGrpSpPr>
-      <p:grpSpPr>
-        <a:xfrm>
-          <a:off x="0" y="0"/>
-          <a:ext cx="0" cy="0"/>
-          <a:chOff x="0" y="0"/>
-          <a:chExt cx="0" cy="0"/>
-        </a:xfrm>
-      </p:grpSpPr>
-      <p:sp>
-        <p:nvSpPr>
-          <p:cNvPr id="2" name="Text 0"/>
-          <p:cNvSpPr/>
-          <p:nvPr/>
-        </p:nvSpPr>
-        <p:spPr>
-          <a:xfrm>
-            <a:off x="457200" y="713232"/>
-            <a:ext cx="11368735" cy="274320"/>
-          </a:xfrm>
-          <a:prstGeom prst="rect">
-            <a:avLst/>
-          </a:prstGeom>
-          <a:noFill/>
-          <a:ln/>
-        </p:spPr>
-        <p:txBody>
-          <a:bodyPr wrap="square" lIns="0" tIns="0" rIns="0" bIns="0" rtlCol="0" anchor="ctr"/>
-          <a:lstStyle/>
-          <a:p>
-            <a:pPr algn="r" indent="0" marL="0">
-              <a:buNone/>
-            </a:pPr>
-            <a:r>
-              <a:rPr lang="en-US" sz="1400" b="1" dirty="0">
-                <a:solidFill>
-                  <a:srgbClr val="1C3F6E"/>
-                </a:solidFill>
-                <a:latin typeface="Calibri" pitchFamily="34" charset="0"/>
-                <a:ea typeface="Calibri" pitchFamily="34" charset="-122"/>
-                <a:cs typeface="Calibri" pitchFamily="34" charset="-120"/>
-              </a:rPr>
-              <a:t>TEACHER'S NOTE</a:t>
-            </a:r>
-            <a:endParaRPr lang="en-US" sz="1400" dirty="0"/>
-          </a:p>
-        </p:txBody>
-      </p:sp>
-      <p:pic>
-        <p:nvPicPr>
-          <p:cNvPr id="3" name="Image 0" descr="/home/claude/f4/img/minesec_sheet.png">    </p:cNvPr>
-          <p:cNvPicPr>
-            <a:picLocks noChangeAspect="1"/>
-          </p:cNvPicPr>
-          <p:nvPr/>
-        </p:nvPicPr>
-        <p:blipFill>
-          <a:blip r:embed="rId1"/>
-          <a:stretch>
-            <a:fillRect/>
-          </a:stretch>
-        </p:blipFill>
-        <p:spPr>
-          <a:xfrm>
-            <a:off x="0" y="658368"/>
-            <a:ext cx="5120640" cy="5833872"/>
-          </a:xfrm>
-          <a:prstGeom prst="rect">
-            <a:avLst/>
-          </a:prstGeom>
-        </p:spPr>
-      </p:pic>
-      <p:sp>
-        <p:nvSpPr>
-          <p:cNvPr id="4" name="Text 1"/>
-          <p:cNvSpPr/>
-          <p:nvPr/>
-        </p:nvSpPr>
-        <p:spPr>
-          <a:xfrm>
-            <a:off x="5349240" y="1005840"/>
-            <a:ext cx="6522415" cy="731520"/>
-          </a:xfrm>
-          <a:prstGeom prst="rect">
-            <a:avLst/>
-          </a:prstGeom>
-          <a:noFill/>
-          <a:ln/>
-        </p:spPr>
-        <p:txBody>
-          <a:bodyPr wrap="square" lIns="0" tIns="0" rIns="0" bIns="0" rtlCol="0" anchor="ctr">
-            <a:normAutofit/>
-          </a:bodyPr>
-          <a:lstStyle/>
-          <a:p>
-            <a:pPr algn="ctr" indent="0" marL="0">
-              <a:buNone/>
-            </a:pPr>
-            <a:r>
-              <a:rPr lang="en-US" sz="3600" b="1" dirty="0">
-                <a:solidFill>
-                  <a:srgbClr val="990011"/>
-                </a:solidFill>
-                <a:latin typeface="Times New Roman" pitchFamily="34" charset="0"/>
-                <a:ea typeface="Times New Roman" pitchFamily="34" charset="-122"/>
-                <a:cs typeface="Times New Roman" pitchFamily="34" charset="-120"/>
-              </a:rPr>
-              <a:t>Teacher's Note</a:t>
-            </a:r>
-            <a:endParaRPr lang="en-US" sz="3600" dirty="0"/>
-          </a:p>
-        </p:txBody>
-      </p:sp>
-      <p:sp>
-        <p:nvSpPr>
-          <p:cNvPr id="5" name="Text 2"/>
-          <p:cNvSpPr/>
-          <p:nvPr/>
-        </p:nvSpPr>
-        <p:spPr>
-          <a:xfrm>
-            <a:off x="5349240" y="1783080"/>
-            <a:ext cx="6522415" cy="4663440"/>
-          </a:xfrm>
-          <a:prstGeom prst="rect">
-            <a:avLst/>
-          </a:prstGeom>
-          <a:noFill/>
-          <a:ln/>
-        </p:spPr>
-        <p:txBody>
-          <a:bodyPr wrap="square" lIns="0" tIns="0" rIns="0" bIns="0" rtlCol="0" anchor="t"/>
-          <a:lstStyle/>
-          <a:p>
-            <a:pPr algn="l" marL="342900" indent="-342900">
-              <a:spcAft>
-                <a:spcPts val="800"/>
-              </a:spcAft>
-              <a:buSzPct val="100000"/>
-              <a:buChar char="•"/>
-            </a:pPr>
-            <a:r>
-              <a:rPr lang="en-US" sz="2000" dirty="0">
-                <a:solidFill>
-                  <a:srgbClr val="111111"/>
-                </a:solidFill>
-                <a:latin typeface="Calibri" pitchFamily="34" charset="0"/>
-                <a:ea typeface="Calibri" pitchFamily="34" charset="-122"/>
-                <a:cs typeface="Calibri" pitchFamily="34" charset="-120"/>
-              </a:rPr>
-              <a:t>Timing: Homework correction, plan, objectives 8 min | Recall, situation, action 10 min | 5 activities 30 min | Board summary (copying) 30 min | Evaluation, remediation 10 min | Homework, next lesson 5 min | Logbook 7 min</a:t>
-            </a:r>
-            <a:endParaRPr lang="en-US" sz="2000" dirty="0"/>
-          </a:p>
-          <a:p>
-            <a:pPr algn="l" marL="342900" indent="-342900">
-              <a:spcAft>
-                <a:spcPts val="800"/>
-              </a:spcAft>
-              <a:buSzPct val="100000"/>
-              <a:buChar char="•"/>
-            </a:pPr>
-            <a:r>
-              <a:rPr lang="en-US" sz="2000" dirty="0">
-                <a:solidFill>
-                  <a:srgbClr val="111111"/>
-                </a:solidFill>
-                <a:latin typeface="Calibri" pitchFamily="34" charset="0"/>
-                <a:ea typeface="Calibri" pitchFamily="34" charset="-122"/>
-                <a:cs typeface="Calibri" pitchFamily="34" charset="-120"/>
-              </a:rPr>
-              <a:t>Without the projector (Activity 1): draw the diagram.</a:t>
-            </a:r>
-            <a:endParaRPr lang="en-US" sz="2000" dirty="0"/>
-          </a:p>
-          <a:p>
-            <a:pPr algn="l" marL="342900" indent="-342900">
-              <a:spcAft>
-                <a:spcPts val="800"/>
-              </a:spcAft>
-              <a:buSzPct val="100000"/>
-              <a:buChar char="•"/>
-            </a:pPr>
-            <a:r>
-              <a:rPr lang="en-US" sz="2000" dirty="0">
-                <a:solidFill>
-                  <a:srgbClr val="111111"/>
-                </a:solidFill>
-                <a:latin typeface="Calibri" pitchFamily="34" charset="0"/>
-                <a:ea typeface="Calibri" pitchFamily="34" charset="-122"/>
-                <a:cs typeface="Calibri" pitchFamily="34" charset="-120"/>
-              </a:rPr>
-              <a:t>Without the projector (Activity 2): describe.</a:t>
-            </a:r>
-            <a:endParaRPr lang="en-US" sz="2000" dirty="0"/>
-          </a:p>
-          <a:p>
-            <a:pPr algn="l" marL="342900" indent="-342900">
-              <a:spcAft>
-                <a:spcPts val="800"/>
-              </a:spcAft>
-              <a:buSzPct val="100000"/>
-              <a:buChar char="•"/>
-            </a:pPr>
-            <a:r>
-              <a:rPr lang="en-US" sz="2000" dirty="0">
-                <a:solidFill>
-                  <a:srgbClr val="111111"/>
-                </a:solidFill>
-                <a:latin typeface="Calibri" pitchFamily="34" charset="0"/>
-                <a:ea typeface="Calibri" pitchFamily="34" charset="-122"/>
-                <a:cs typeface="Calibri" pitchFamily="34" charset="-120"/>
-              </a:rPr>
-              <a:t>Without the projector (Activity 3): use the map.</a:t>
-            </a:r>
-            <a:endParaRPr lang="en-US" sz="2000" dirty="0"/>
-          </a:p>
-          <a:p>
-            <a:pPr algn="l" marL="342900" indent="-342900">
-              <a:spcAft>
-                <a:spcPts val="800"/>
-              </a:spcAft>
-              <a:buSzPct val="100000"/>
-              <a:buChar char="•"/>
-            </a:pPr>
-            <a:r>
-              <a:rPr lang="en-US" sz="2000" dirty="0">
-                <a:solidFill>
-                  <a:srgbClr val="111111"/>
-                </a:solidFill>
-                <a:latin typeface="Calibri" pitchFamily="34" charset="0"/>
-                <a:ea typeface="Calibri" pitchFamily="34" charset="-122"/>
-                <a:cs typeface="Calibri" pitchFamily="34" charset="-120"/>
-              </a:rPr>
-              <a:t>Without the projector (Activity 4): discuss.</a:t>
-            </a:r>
-            <a:endParaRPr lang="en-US" sz="2000" dirty="0"/>
-          </a:p>
-          <a:p>
-            <a:pPr algn="l" marL="342900" indent="-342900">
-              <a:spcAft>
-                <a:spcPts val="800"/>
-              </a:spcAft>
-              <a:buSzPct val="100000"/>
-              <a:buChar char="•"/>
-            </a:pPr>
-            <a:r>
-              <a:rPr lang="en-US" sz="2000" dirty="0">
-                <a:solidFill>
-                  <a:srgbClr val="111111"/>
-                </a:solidFill>
-                <a:latin typeface="Calibri" pitchFamily="34" charset="0"/>
-                <a:ea typeface="Calibri" pitchFamily="34" charset="-122"/>
-                <a:cs typeface="Calibri" pitchFamily="34" charset="-120"/>
-              </a:rPr>
-              <a:t>Without the projector (Activity 5): discuss.</a:t>
-            </a:r>
-            <a:endParaRPr lang="en-US" sz="2000" dirty="0"/>
-          </a:p>
-        </p:txBody>
-      </p:sp>
-      <p:sp>
-        <p:nvSpPr>
-          <p:cNvPr id="25" name="Slide Number Placeholder 0"/>
-          <p:cNvSpPr>
-            <a:spLocks noGrp="1"/>
-          </p:cNvSpPr>
-          <p:nvPr>
-            <p:ph type="sldNum" sz="quarter" idx="4294967295"/>
-          </p:nvPr>
-        </p:nvSpPr>
-        <p:spPr>
-          <a:xfrm>
-            <a:off x="27432" y="91440"/>
-            <a:ext cx="585216" cy="475488"/>
-          </a:xfrm>
-          <a:prstGeom prst="rect">
-            <a:avLst/>
-          </a:prstGeom>
-          <a:extLst>
-            <a:ext uri="{C572A759-6A51-4108-AA02-DFA0A04FC94B}">
-              <ma14:wrappingTextBoxFlag xmlns:ma14="http://schemas.microsoft.com/office/mac/drawingml/2011/main" val="0"/>
-            </a:ext>
-          </a:extLst>
-        </p:spPr>
-        <p:txBody>
-          <a:bodyPr/>
-          <a:lstStyle>
-            <a:lvl1pPr>
-              <a:defRPr sz="2000">
-                <a:solidFill>
-                  <a:srgbClr val="FFFFFF"/>
-                </a:solidFill>
-                <a:latin typeface="Calibri"/>
-                <a:ea typeface="Calibri"/>
-                <a:cs typeface="Calibri"/>
-              </a:defRPr>
-            </a:lvl1pPr>
-          </a:lstStyle>
-          <a:p>
-            <a:pPr algn="ctr"/>
-            <a:fld id="{F7021451-1387-4CA6-816F-3879F97B5CBC}" type="slidenum">
-              <a:rPr b="1" lang="en-US"/>
               <a:t>49</a:t>
             </a:fld>
             <a:endParaRPr lang="en-US"/>
@@ -19537,7 +19711,7 @@
                 <a:ea typeface="Calibri" pitchFamily="34" charset="-122"/>
                 <a:cs typeface="Calibri" pitchFamily="34" charset="-120"/>
               </a:rPr>
-              <a:t>REFERENCES</a:t>
+              <a:t>TEACHER'S NOTE</a:t>
             </a:r>
             <a:endParaRPr lang="en-US" sz="1400" dirty="0"/>
           </a:p>
@@ -19602,7 +19776,7 @@
                 <a:ea typeface="Times New Roman" pitchFamily="34" charset="-122"/>
                 <a:cs typeface="Times New Roman" pitchFamily="34" charset="-120"/>
               </a:rPr>
-              <a:t>References</a:t>
+              <a:t>Teacher's Note</a:t>
             </a:r>
             <a:endParaRPr lang="en-US" sz="3600" dirty="0"/>
           </a:p>
@@ -19637,7 +19811,7 @@
               <a:buChar char="•"/>
             </a:pPr>
             <a:r>
-              <a:rPr lang="en-US" sz="1800" dirty="0">
+              <a:rPr lang="en-US" sz="2000" dirty="0">
                 <a:solidFill>
                   <a:srgbClr val="111111"/>
                 </a:solidFill>
@@ -19645,9 +19819,9 @@
                 <a:ea typeface="Calibri" pitchFamily="34" charset="-122"/>
                 <a:cs typeface="Calibri" pitchFamily="34" charset="-120"/>
               </a:rPr>
-              <a:t>Geography Syllabus, Forms I–V, MINESEC (2023) — Form 5, Module III: Management of Population Growth and Space Colonisation.</a:t>
-            </a:r>
-            <a:endParaRPr lang="en-US" sz="1800" dirty="0"/>
+              <a:t>Timing: Homework correction, plan, objectives 8 min | Recall, situation, action 10 min | 5 activities 30 min | Board summary (copying) 30 min | Evaluation, remediation 10 min | Homework, next lesson 5 min | Logbook 7 min</a:t>
+            </a:r>
+            <a:endParaRPr lang="en-US" sz="2000" dirty="0"/>
           </a:p>
           <a:p>
             <a:pPr algn="l" marL="342900" indent="-342900">
@@ -19658,7 +19832,7 @@
               <a:buChar char="•"/>
             </a:pPr>
             <a:r>
-              <a:rPr lang="en-US" sz="1800" dirty="0">
+              <a:rPr lang="en-US" sz="2000" dirty="0">
                 <a:solidFill>
                   <a:srgbClr val="111111"/>
                 </a:solidFill>
@@ -19666,9 +19840,9 @@
                 <a:ea typeface="Calibri" pitchFamily="34" charset="-122"/>
                 <a:cs typeface="Calibri" pitchFamily="34" charset="-120"/>
               </a:rPr>
-              <a:t>Photo, Activity 2: “Duala, Camerún (Douala, Cameroon)” by migmasat, Public domain 1.0, via Flickr (https://www.flickr.com/photos/197415759@N06/54386998088)</a:t>
-            </a:r>
-            <a:endParaRPr lang="en-US" sz="1800" dirty="0"/>
+              <a:t>Without the projector (Activity 1): draw the diagram.</a:t>
+            </a:r>
+            <a:endParaRPr lang="en-US" sz="2000" dirty="0"/>
           </a:p>
           <a:p>
             <a:pPr algn="l" marL="342900" indent="-342900">
@@ -19679,7 +19853,7 @@
               <a:buChar char="•"/>
             </a:pPr>
             <a:r>
-              <a:rPr lang="en-US" sz="1800" dirty="0">
+              <a:rPr lang="en-US" sz="2000" dirty="0">
                 <a:solidFill>
                   <a:srgbClr val="111111"/>
                 </a:solidFill>
@@ -19687,9 +19861,9 @@
                 <a:ea typeface="Calibri" pitchFamily="34" charset="-122"/>
                 <a:cs typeface="Calibri" pitchFamily="34" charset="-120"/>
               </a:rPr>
-              <a:t>Photo, Activity 4: “JAXPORT Welcomes Largest Container Ship To Date” by JAXPORT, CC BY-NC 2.0, via Flickr (https://www.flickr.com/photos/24847875@N05/17069054628)</a:t>
-            </a:r>
-            <a:endParaRPr lang="en-US" sz="1800" dirty="0"/>
+              <a:t>Without the projector (Activity 2): describe.</a:t>
+            </a:r>
+            <a:endParaRPr lang="en-US" sz="2000" dirty="0"/>
           </a:p>
           <a:p>
             <a:pPr algn="l" marL="342900" indent="-342900">
@@ -19700,7 +19874,7 @@
               <a:buChar char="•"/>
             </a:pPr>
             <a:r>
-              <a:rPr lang="en-US" sz="1800" dirty="0">
+              <a:rPr lang="en-US" sz="2000" dirty="0">
                 <a:solidFill>
                   <a:srgbClr val="111111"/>
                 </a:solidFill>
@@ -19708,9 +19882,9 @@
                 <a:ea typeface="Calibri" pitchFamily="34" charset="-122"/>
                 <a:cs typeface="Calibri" pitchFamily="34" charset="-120"/>
               </a:rPr>
-              <a:t>Photo, Activity 5: “Vicenza flooding Nov.1, 2010” by US Army Africa, CC BY 2.0, via Flickr (https://www.flickr.com/photos/36281822@N08/5157191333)</a:t>
-            </a:r>
-            <a:endParaRPr lang="en-US" sz="1800" dirty="0"/>
+              <a:t>Without the projector (Activity 3): use the map.</a:t>
+            </a:r>
+            <a:endParaRPr lang="en-US" sz="2000" dirty="0"/>
           </a:p>
           <a:p>
             <a:pPr algn="l" marL="342900" indent="-342900">
@@ -19721,7 +19895,7 @@
               <a:buChar char="•"/>
             </a:pPr>
             <a:r>
-              <a:rPr lang="en-US" sz="1800" dirty="0">
+              <a:rPr lang="en-US" sz="2000" dirty="0">
                 <a:solidFill>
                   <a:srgbClr val="111111"/>
                 </a:solidFill>
@@ -19729,9 +19903,30 @@
                 <a:ea typeface="Calibri" pitchFamily="34" charset="-122"/>
                 <a:cs typeface="Calibri" pitchFamily="34" charset="-120"/>
               </a:rPr>
-              <a:t>Diagrams and animations: drawn for this lesson (Geography Department).</a:t>
-            </a:r>
-            <a:endParaRPr lang="en-US" sz="1800" dirty="0"/>
+              <a:t>Without the projector (Activity 4): discuss.</a:t>
+            </a:r>
+            <a:endParaRPr lang="en-US" sz="2000" dirty="0"/>
+          </a:p>
+          <a:p>
+            <a:pPr algn="l" marL="342900" indent="-342900">
+              <a:spcAft>
+                <a:spcPts val="800"/>
+              </a:spcAft>
+              <a:buSzPct val="100000"/>
+              <a:buChar char="•"/>
+            </a:pPr>
+            <a:r>
+              <a:rPr lang="en-US" sz="2000" dirty="0">
+                <a:solidFill>
+                  <a:srgbClr val="111111"/>
+                </a:solidFill>
+                <a:latin typeface="Calibri" pitchFamily="34" charset="0"/>
+                <a:ea typeface="Calibri" pitchFamily="34" charset="-122"/>
+                <a:cs typeface="Calibri" pitchFamily="34" charset="-120"/>
+              </a:rPr>
+              <a:t>Without the projector (Activity 5): discuss.</a:t>
+            </a:r>
+            <a:endParaRPr lang="en-US" sz="2000" dirty="0"/>
           </a:p>
         </p:txBody>
       </p:sp>
@@ -19778,6 +19973,310 @@
             <a:fld id="{F7021451-1387-4CA6-816F-3879F97B5CBC}" type="slidenum">
               <a:rPr b="1" lang="en-US"/>
               <a:t>50</a:t>
+            </a:fld>
+            <a:endParaRPr lang="en-US"/>
+          </a:p>
+        </p:txBody>
+      </p:sp>
+    </p:spTree>
+  </p:cSld>
+  <p:clrMapOvr>
+    <a:masterClrMapping/>
+  </p:clrMapOvr>
+</p:sld>
+</file>
+
+<file path=ppt/slides/slide51.xml><?xml version="1.0" encoding="utf-8"?>
+<p:sld xmlns:a="http://schemas.openxmlformats.org/drawingml/2006/main" xmlns:r="http://schemas.openxmlformats.org/officeDocument/2006/relationships" xmlns:p="http://schemas.openxmlformats.org/presentationml/2006/main">
+  <p:cSld name="Slide 51">
+    <p:spTree>
+      <p:nvGrpSpPr>
+        <p:cNvPr id="1" name=""/>
+        <p:cNvGrpSpPr/>
+        <p:nvPr/>
+      </p:nvGrpSpPr>
+      <p:grpSpPr>
+        <a:xfrm>
+          <a:off x="0" y="0"/>
+          <a:ext cx="0" cy="0"/>
+          <a:chOff x="0" y="0"/>
+          <a:chExt cx="0" cy="0"/>
+        </a:xfrm>
+      </p:grpSpPr>
+      <p:sp>
+        <p:nvSpPr>
+          <p:cNvPr id="2" name="Text 0"/>
+          <p:cNvSpPr/>
+          <p:nvPr/>
+        </p:nvSpPr>
+        <p:spPr>
+          <a:xfrm>
+            <a:off x="457200" y="713232"/>
+            <a:ext cx="11368735" cy="274320"/>
+          </a:xfrm>
+          <a:prstGeom prst="rect">
+            <a:avLst/>
+          </a:prstGeom>
+          <a:noFill/>
+          <a:ln/>
+        </p:spPr>
+        <p:txBody>
+          <a:bodyPr wrap="square" lIns="0" tIns="0" rIns="0" bIns="0" rtlCol="0" anchor="ctr"/>
+          <a:lstStyle/>
+          <a:p>
+            <a:pPr algn="r" indent="0" marL="0">
+              <a:buNone/>
+            </a:pPr>
+            <a:r>
+              <a:rPr lang="en-US" sz="1400" b="1" dirty="0">
+                <a:solidFill>
+                  <a:srgbClr val="1C3F6E"/>
+                </a:solidFill>
+                <a:latin typeface="Calibri" pitchFamily="34" charset="0"/>
+                <a:ea typeface="Calibri" pitchFamily="34" charset="-122"/>
+                <a:cs typeface="Calibri" pitchFamily="34" charset="-120"/>
+              </a:rPr>
+              <a:t>REFERENCES</a:t>
+            </a:r>
+            <a:endParaRPr lang="en-US" sz="1400" dirty="0"/>
+          </a:p>
+        </p:txBody>
+      </p:sp>
+      <p:pic>
+        <p:nvPicPr>
+          <p:cNvPr id="3" name="Image 0" descr="/home/claude/f4/img/minesec_sheet.png">    </p:cNvPr>
+          <p:cNvPicPr>
+            <a:picLocks noChangeAspect="1"/>
+          </p:cNvPicPr>
+          <p:nvPr/>
+        </p:nvPicPr>
+        <p:blipFill>
+          <a:blip r:embed="rId1"/>
+          <a:stretch>
+            <a:fillRect/>
+          </a:stretch>
+        </p:blipFill>
+        <p:spPr>
+          <a:xfrm>
+            <a:off x="0" y="658368"/>
+            <a:ext cx="5120640" cy="5833872"/>
+          </a:xfrm>
+          <a:prstGeom prst="rect">
+            <a:avLst/>
+          </a:prstGeom>
+        </p:spPr>
+      </p:pic>
+      <p:sp>
+        <p:nvSpPr>
+          <p:cNvPr id="4" name="Text 1"/>
+          <p:cNvSpPr/>
+          <p:nvPr/>
+        </p:nvSpPr>
+        <p:spPr>
+          <a:xfrm>
+            <a:off x="5349240" y="1005840"/>
+            <a:ext cx="6522415" cy="731520"/>
+          </a:xfrm>
+          <a:prstGeom prst="rect">
+            <a:avLst/>
+          </a:prstGeom>
+          <a:noFill/>
+          <a:ln/>
+        </p:spPr>
+        <p:txBody>
+          <a:bodyPr wrap="square" lIns="0" tIns="0" rIns="0" bIns="0" rtlCol="0" anchor="ctr">
+            <a:normAutofit/>
+          </a:bodyPr>
+          <a:lstStyle/>
+          <a:p>
+            <a:pPr algn="ctr" indent="0" marL="0">
+              <a:buNone/>
+            </a:pPr>
+            <a:r>
+              <a:rPr lang="en-US" sz="3600" b="1" dirty="0">
+                <a:solidFill>
+                  <a:srgbClr val="990011"/>
+                </a:solidFill>
+                <a:latin typeface="Times New Roman" pitchFamily="34" charset="0"/>
+                <a:ea typeface="Times New Roman" pitchFamily="34" charset="-122"/>
+                <a:cs typeface="Times New Roman" pitchFamily="34" charset="-120"/>
+              </a:rPr>
+              <a:t>References</a:t>
+            </a:r>
+            <a:endParaRPr lang="en-US" sz="3600" dirty="0"/>
+          </a:p>
+        </p:txBody>
+      </p:sp>
+      <p:sp>
+        <p:nvSpPr>
+          <p:cNvPr id="5" name="Text 2"/>
+          <p:cNvSpPr/>
+          <p:nvPr/>
+        </p:nvSpPr>
+        <p:spPr>
+          <a:xfrm>
+            <a:off x="5349240" y="1783080"/>
+            <a:ext cx="6522415" cy="4663440"/>
+          </a:xfrm>
+          <a:prstGeom prst="rect">
+            <a:avLst/>
+          </a:prstGeom>
+          <a:noFill/>
+          <a:ln/>
+        </p:spPr>
+        <p:txBody>
+          <a:bodyPr wrap="square" lIns="0" tIns="0" rIns="0" bIns="0" rtlCol="0" anchor="t"/>
+          <a:lstStyle/>
+          <a:p>
+            <a:pPr algn="l" marL="342900" indent="-342900">
+              <a:spcAft>
+                <a:spcPts val="800"/>
+              </a:spcAft>
+              <a:buSzPct val="100000"/>
+              <a:buChar char="•"/>
+            </a:pPr>
+            <a:r>
+              <a:rPr lang="en-US" sz="1800" dirty="0">
+                <a:solidFill>
+                  <a:srgbClr val="111111"/>
+                </a:solidFill>
+                <a:latin typeface="Calibri" pitchFamily="34" charset="0"/>
+                <a:ea typeface="Calibri" pitchFamily="34" charset="-122"/>
+                <a:cs typeface="Calibri" pitchFamily="34" charset="-120"/>
+              </a:rPr>
+              <a:t>Geography Syllabus, Forms I–V, MINESEC (2023) — Form 5, Module III: Management of Population Growth and Space Colonisation.</a:t>
+            </a:r>
+            <a:endParaRPr lang="en-US" sz="1800" dirty="0"/>
+          </a:p>
+          <a:p>
+            <a:pPr algn="l" marL="342900" indent="-342900">
+              <a:spcAft>
+                <a:spcPts val="800"/>
+              </a:spcAft>
+              <a:buSzPct val="100000"/>
+              <a:buChar char="•"/>
+            </a:pPr>
+            <a:r>
+              <a:rPr lang="en-US" sz="1800" dirty="0">
+                <a:solidFill>
+                  <a:srgbClr val="111111"/>
+                </a:solidFill>
+                <a:latin typeface="Calibri" pitchFamily="34" charset="0"/>
+                <a:ea typeface="Calibri" pitchFamily="34" charset="-122"/>
+                <a:cs typeface="Calibri" pitchFamily="34" charset="-120"/>
+              </a:rPr>
+              <a:t>Photo, Activity 2: “Duala, Camerún (Douala, Cameroon)” by migmasat, Public domain 1.0, via Flickr (https://www.flickr.com/photos/197415759@N06/54386998088)</a:t>
+            </a:r>
+            <a:endParaRPr lang="en-US" sz="1800" dirty="0"/>
+          </a:p>
+          <a:p>
+            <a:pPr algn="l" marL="342900" indent="-342900">
+              <a:spcAft>
+                <a:spcPts val="800"/>
+              </a:spcAft>
+              <a:buSzPct val="100000"/>
+              <a:buChar char="•"/>
+            </a:pPr>
+            <a:r>
+              <a:rPr lang="en-US" sz="1800" dirty="0">
+                <a:solidFill>
+                  <a:srgbClr val="111111"/>
+                </a:solidFill>
+                <a:latin typeface="Calibri" pitchFamily="34" charset="0"/>
+                <a:ea typeface="Calibri" pitchFamily="34" charset="-122"/>
+                <a:cs typeface="Calibri" pitchFamily="34" charset="-120"/>
+              </a:rPr>
+              <a:t>Photo, Activity 4: “JAXPORT Welcomes Largest Container Ship To Date” by JAXPORT, CC BY-NC 2.0, via Flickr (https://www.flickr.com/photos/24847875@N05/17069054628)</a:t>
+            </a:r>
+            <a:endParaRPr lang="en-US" sz="1800" dirty="0"/>
+          </a:p>
+          <a:p>
+            <a:pPr algn="l" marL="342900" indent="-342900">
+              <a:spcAft>
+                <a:spcPts val="800"/>
+              </a:spcAft>
+              <a:buSzPct val="100000"/>
+              <a:buChar char="•"/>
+            </a:pPr>
+            <a:r>
+              <a:rPr lang="en-US" sz="1800" dirty="0">
+                <a:solidFill>
+                  <a:srgbClr val="111111"/>
+                </a:solidFill>
+                <a:latin typeface="Calibri" pitchFamily="34" charset="0"/>
+                <a:ea typeface="Calibri" pitchFamily="34" charset="-122"/>
+                <a:cs typeface="Calibri" pitchFamily="34" charset="-120"/>
+              </a:rPr>
+              <a:t>Photo, Activity 5: “Vicenza flooding Nov.1, 2010” by US Army Africa, CC BY 2.0, via Flickr (https://www.flickr.com/photos/36281822@N08/5157191333)</a:t>
+            </a:r>
+            <a:endParaRPr lang="en-US" sz="1800" dirty="0"/>
+          </a:p>
+          <a:p>
+            <a:pPr algn="l" marL="342900" indent="-342900">
+              <a:spcAft>
+                <a:spcPts val="800"/>
+              </a:spcAft>
+              <a:buSzPct val="100000"/>
+              <a:buChar char="•"/>
+            </a:pPr>
+            <a:r>
+              <a:rPr lang="en-US" sz="1800" dirty="0">
+                <a:solidFill>
+                  <a:srgbClr val="111111"/>
+                </a:solidFill>
+                <a:latin typeface="Calibri" pitchFamily="34" charset="0"/>
+                <a:ea typeface="Calibri" pitchFamily="34" charset="-122"/>
+                <a:cs typeface="Calibri" pitchFamily="34" charset="-120"/>
+              </a:rPr>
+              <a:t>Diagrams and animations: drawn for this lesson (Geography Department).</a:t>
+            </a:r>
+            <a:endParaRPr lang="en-US" sz="1800" dirty="0"/>
+          </a:p>
+        </p:txBody>
+      </p:sp>
+      <p:sp>
+        <p:nvSpPr>
+          <p:cNvPr id="25" name="Slide Number Placeholder 0"/>
+          <p:cNvSpPr>
+            <a:spLocks noGrp="1"/>
+          </p:cNvSpPr>
+          <p:nvPr>
+            <p:ph type="sldNum" sz="quarter" idx="4294967295"/>
+          </p:nvPr>
+        </p:nvSpPr>
+        <p:spPr>
+          <a:xfrm>
+            <a:off x="27432" y="91440"/>
+            <a:ext cx="585216" cy="475488"/>
+          </a:xfrm>
+          <a:prstGeom prst="rect">
+            <a:avLst/>
+          </a:prstGeom>
+          <a:extLst>
+            <a:ext uri="{C572A759-6A51-4108-AA02-DFA0A04FC94B}">
+              <ma14:wrappingTextBoxFlag xmlns:ma14="http://schemas.microsoft.com/office/mac/drawingml/2011/main" val="0"/>
+            </a:ext>
+          </a:extLst>
+        </p:spPr>
+        <p:txBody>
+          <a:bodyPr/>
+          <a:lstStyle>
+            <a:lvl1pPr>
+              <a:defRPr sz="2000">
+                <a:solidFill>
+                  <a:srgbClr val="FFFFFF"/>
+                </a:solidFill>
+                <a:latin typeface="Calibri"/>
+                <a:ea typeface="Calibri"/>
+                <a:cs typeface="Calibri"/>
+              </a:defRPr>
+            </a:lvl1pPr>
+          </a:lstStyle>
+          <a:p>
+            <a:pPr algn="ctr"/>
+            <a:fld id="{F7021451-1387-4CA6-816F-3879F97B5CBC}" type="slidenum">
+              <a:rPr b="1" lang="en-US"/>
+              <a:t>51</a:t>
             </a:fld>
             <a:endParaRPr lang="en-US"/>
           </a:p>
